--- a/ppt/villamosszereles11/30_het.pptx
+++ b/ppt/villamosszereles11/30_het.pptx
@@ -3171,14 +3171,13 @@
           </a:bodyPr>
           <a:lstStyle/>
           <a:p>
-            <a:pPr>
-              <a:defRPr sz="900">
+            <a:r>
+              <a:rPr sz="900" b="0">
                 <a:solidFill>
                   <a:srgbClr val="52606D"/>
                 </a:solidFill>
-              </a:defRPr>
-            </a:pPr>
-            <a:r>
+                <a:latin typeface="Liberation Sans"/>
+              </a:rPr>
               <a:t>IAP - Integrált Automatika Program | Villamos szerelések 11.</a:t>
             </a:r>
           </a:p>
@@ -3206,14 +3205,13 @@
           </a:bodyPr>
           <a:lstStyle/>
           <a:p>
-            <a:pPr>
-              <a:defRPr b="1" sz="2700">
+            <a:r>
+              <a:rPr sz="2700" b="1">
                 <a:solidFill>
                   <a:srgbClr val="0D47A1"/>
                 </a:solidFill>
-              </a:defRPr>
-            </a:pPr>
-            <a:r>
+                <a:latin typeface="Liberation Sans"/>
+              </a:rPr>
               <a:t>30. hét - Szerelési dokumentáció</a:t>
             </a:r>
           </a:p>
@@ -3241,14 +3239,13 @@
           </a:bodyPr>
           <a:lstStyle/>
           <a:p>
-            <a:pPr>
-              <a:defRPr sz="1300">
+            <a:r>
+              <a:rPr sz="1300" b="0">
                 <a:solidFill>
                   <a:srgbClr val="52606D"/>
                 </a:solidFill>
-              </a:defRPr>
-            </a:pPr>
-            <a:r>
+                <a:latin typeface="Liberation Sans"/>
+              </a:rPr>
               <a:t>88-90. óra | A jó szerelés visszakereshető, ellenőrizhető és javítható</a:t>
             </a:r>
           </a:p>
@@ -3321,14 +3318,13 @@
           </a:bodyPr>
           <a:lstStyle/>
           <a:p>
-            <a:pPr>
-              <a:defRPr b="1" sz="1600">
+            <a:r>
+              <a:rPr sz="1600" b="1">
                 <a:solidFill>
                   <a:srgbClr val="0D47A1"/>
                 </a:solidFill>
-              </a:defRPr>
-            </a:pPr>
-            <a:r>
+                <a:latin typeface="Liberation Sans"/>
+              </a:rPr>
               <a:t>RAJZ</a:t>
             </a:r>
           </a:p>
@@ -3337,13 +3333,14 @@
               <a:spcBef>
                 <a:spcPts val="600"/>
               </a:spcBef>
-              <a:defRPr sz="1200">
+            </a:pPr>
+            <a:r>
+              <a:rPr sz="1200" b="0">
                 <a:solidFill>
                   <a:srgbClr val="102A43"/>
                 </a:solidFill>
-              </a:defRPr>
-            </a:pPr>
-            <a:r>
+                <a:latin typeface="Liberation Sans"/>
+              </a:rPr>
               <a:t>Megmutatja a kapcsolás logikáját és a fizikai elrendezést.</a:t>
             </a:r>
           </a:p>
@@ -3416,14 +3413,13 @@
           </a:bodyPr>
           <a:lstStyle/>
           <a:p>
-            <a:pPr>
-              <a:defRPr b="1" sz="1600">
+            <a:r>
+              <a:rPr sz="1600" b="1">
                 <a:solidFill>
                   <a:srgbClr val="0D47A1"/>
                 </a:solidFill>
-              </a:defRPr>
-            </a:pPr>
-            <a:r>
+                <a:latin typeface="Liberation Sans"/>
+              </a:rPr>
               <a:t>JELÖLÉS</a:t>
             </a:r>
           </a:p>
@@ -3432,13 +3428,14 @@
               <a:spcBef>
                 <a:spcPts val="600"/>
               </a:spcBef>
-              <a:defRPr sz="1200">
+            </a:pPr>
+            <a:r>
+              <a:rPr sz="1200" b="0">
                 <a:solidFill>
                   <a:srgbClr val="102A43"/>
                 </a:solidFill>
-              </a:defRPr>
-            </a:pPr>
-            <a:r>
+                <a:latin typeface="Liberation Sans"/>
+              </a:rPr>
               <a:t>Összeköti a rajzot a valós készülékkel, kapoccsal és vezetékkel.</a:t>
             </a:r>
           </a:p>
@@ -3511,14 +3508,13 @@
           </a:bodyPr>
           <a:lstStyle/>
           <a:p>
-            <a:pPr>
-              <a:defRPr b="1" sz="1600">
+            <a:r>
+              <a:rPr sz="1600" b="1">
                 <a:solidFill>
                   <a:srgbClr val="0D47A1"/>
                 </a:solidFill>
-              </a:defRPr>
-            </a:pPr>
-            <a:r>
+                <a:latin typeface="Liberation Sans"/>
+              </a:rPr>
               <a:t>JEGYZŐKÖNYV</a:t>
             </a:r>
           </a:p>
@@ -3527,13 +3523,14 @@
               <a:spcBef>
                 <a:spcPts val="600"/>
               </a:spcBef>
-              <a:defRPr sz="1200">
+            </a:pPr>
+            <a:r>
+              <a:rPr sz="1200" b="0">
                 <a:solidFill>
                   <a:srgbClr val="102A43"/>
                 </a:solidFill>
-              </a:defRPr>
-            </a:pPr>
-            <a:r>
+                <a:latin typeface="Liberation Sans"/>
+              </a:rPr>
               <a:t>Rögzíti az ellenőrzés, mérés és átadás bizonyítható adatait.</a:t>
             </a:r>
           </a:p>
@@ -3630,14 +3627,13 @@
           </a:bodyPr>
           <a:lstStyle/>
           <a:p>
-            <a:pPr>
-              <a:defRPr sz="900">
+            <a:r>
+              <a:rPr sz="900" b="0">
                 <a:solidFill>
                   <a:srgbClr val="52606D"/>
                 </a:solidFill>
-              </a:defRPr>
-            </a:pPr>
-            <a:r>
+                <a:latin typeface="Liberation Sans"/>
+              </a:rPr>
               <a:t>IAP - Integrált Automatika Program | Villamos szerelések 11.</a:t>
             </a:r>
           </a:p>
@@ -3665,14 +3661,13 @@
           </a:bodyPr>
           <a:lstStyle/>
           <a:p>
-            <a:pPr>
-              <a:defRPr b="1" sz="2700">
+            <a:r>
+              <a:rPr sz="2700" b="1">
                 <a:solidFill>
                   <a:srgbClr val="0D47A1"/>
                 </a:solidFill>
-              </a:defRPr>
-            </a:pPr>
-            <a:r>
+                <a:latin typeface="Liberation Sans"/>
+              </a:rPr>
               <a:t>IAP heti kihívás</a:t>
             </a:r>
           </a:p>
@@ -3745,14 +3740,13 @@
           </a:bodyPr>
           <a:lstStyle/>
           <a:p>
-            <a:pPr>
-              <a:defRPr b="1" sz="1600">
+            <a:r>
+              <a:rPr sz="1600" b="1">
                 <a:solidFill>
                   <a:srgbClr val="0D47A1"/>
                 </a:solidFill>
-              </a:defRPr>
-            </a:pPr>
-            <a:r>
+                <a:latin typeface="Liberation Sans"/>
+              </a:rPr>
               <a:t>ÁLLÍTÁS</a:t>
             </a:r>
           </a:p>
@@ -3761,13 +3755,14 @@
               <a:spcBef>
                 <a:spcPts val="600"/>
               </a:spcBef>
-              <a:defRPr sz="1200">
+            </a:pPr>
+            <a:r>
+              <a:rPr sz="1200" b="0">
                 <a:solidFill>
                   <a:srgbClr val="102A43"/>
                 </a:solidFill>
-              </a:defRPr>
-            </a:pPr>
-            <a:r>
+                <a:latin typeface="Liberation Sans"/>
+              </a:rPr>
               <a:t>Ha a berendezés működik, a szerelés közben végzett változtatásokat nem szükséges átvezetni a rajzra.</a:t>
             </a:r>
           </a:p>
@@ -3840,14 +3835,13 @@
           </a:bodyPr>
           <a:lstStyle/>
           <a:p>
-            <a:pPr>
-              <a:defRPr b="1" sz="1600">
+            <a:r>
+              <a:rPr sz="1600" b="1">
                 <a:solidFill>
                   <a:srgbClr val="0D47A1"/>
                 </a:solidFill>
-              </a:defRPr>
-            </a:pPr>
-            <a:r>
+                <a:latin typeface="Liberation Sans"/>
+              </a:rPr>
               <a:t>VÁLASZ: NEM</a:t>
             </a:r>
           </a:p>
@@ -3856,13 +3850,14 @@
               <a:spcBef>
                 <a:spcPts val="600"/>
               </a:spcBef>
-              <a:defRPr sz="1200">
+            </a:pPr>
+            <a:r>
+              <a:rPr sz="1200" b="0">
                 <a:solidFill>
                   <a:srgbClr val="102A43"/>
                 </a:solidFill>
-              </a:defRPr>
-            </a:pPr>
-            <a:r>
+                <a:latin typeface="Liberation Sans"/>
+              </a:rPr>
               <a:t>A dokumentációnak a tényleges állapotot kell tükröznie.</a:t>
             </a:r>
           </a:p>
@@ -3959,14 +3954,13 @@
           </a:bodyPr>
           <a:lstStyle/>
           <a:p>
-            <a:pPr>
-              <a:defRPr sz="900">
+            <a:r>
+              <a:rPr sz="900" b="0">
                 <a:solidFill>
                   <a:srgbClr val="52606D"/>
                 </a:solidFill>
-              </a:defRPr>
-            </a:pPr>
-            <a:r>
+                <a:latin typeface="Liberation Sans"/>
+              </a:rPr>
               <a:t>IAP - Integrált Automatika Program | Villamos szerelések 11.</a:t>
             </a:r>
           </a:p>
@@ -3994,14 +3988,13 @@
           </a:bodyPr>
           <a:lstStyle/>
           <a:p>
-            <a:pPr>
-              <a:defRPr b="1" sz="2700">
+            <a:r>
+              <a:rPr sz="2700" b="1">
                 <a:solidFill>
                   <a:srgbClr val="0D47A1"/>
                 </a:solidFill>
-              </a:defRPr>
-            </a:pPr>
-            <a:r>
+                <a:latin typeface="Liberation Sans"/>
+              </a:rPr>
               <a:t>Összefoglalás</a:t>
             </a:r>
           </a:p>
@@ -4029,14 +4022,13 @@
           </a:bodyPr>
           <a:lstStyle/>
           <a:p>
-            <a:pPr>
-              <a:defRPr sz="1300">
+            <a:r>
+              <a:rPr sz="1300" b="0">
                 <a:solidFill>
                   <a:srgbClr val="52606D"/>
                 </a:solidFill>
-              </a:defRPr>
-            </a:pPr>
-            <a:r>
+                <a:latin typeface="Liberation Sans"/>
+              </a:rPr>
               <a:t>A dokumentáció a szerelés része - nem utólagos papírmunka</a:t>
             </a:r>
           </a:p>
@@ -4109,14 +4101,13 @@
           </a:bodyPr>
           <a:lstStyle/>
           <a:p>
-            <a:pPr>
-              <a:defRPr b="1" sz="1600">
+            <a:r>
+              <a:rPr sz="1600" b="1">
                 <a:solidFill>
                   <a:srgbClr val="0D47A1"/>
                 </a:solidFill>
-              </a:defRPr>
-            </a:pPr>
-            <a:r>
+                <a:latin typeface="Liberation Sans"/>
+              </a:rPr>
               <a:t>Pontos</a:t>
             </a:r>
           </a:p>
@@ -4125,13 +4116,14 @@
               <a:spcBef>
                 <a:spcPts val="600"/>
               </a:spcBef>
-              <a:defRPr sz="1200">
+            </a:pPr>
+            <a:r>
+              <a:rPr sz="1200" b="0">
                 <a:solidFill>
                   <a:srgbClr val="102A43"/>
                 </a:solidFill>
-              </a:defRPr>
-            </a:pPr>
-            <a:r>
+                <a:latin typeface="Liberation Sans"/>
+              </a:rPr>
               <a:t>A valós állapotot mutatja.</a:t>
             </a:r>
           </a:p>
@@ -4204,14 +4196,13 @@
           </a:bodyPr>
           <a:lstStyle/>
           <a:p>
-            <a:pPr>
-              <a:defRPr b="1" sz="1600">
+            <a:r>
+              <a:rPr sz="1600" b="1">
                 <a:solidFill>
                   <a:srgbClr val="0D47A1"/>
                 </a:solidFill>
-              </a:defRPr>
-            </a:pPr>
-            <a:r>
+                <a:latin typeface="Liberation Sans"/>
+              </a:rPr>
               <a:t>Egységes</a:t>
             </a:r>
           </a:p>
@@ -4220,13 +4211,14 @@
               <a:spcBef>
                 <a:spcPts val="600"/>
               </a:spcBef>
-              <a:defRPr sz="1200">
+            </a:pPr>
+            <a:r>
+              <a:rPr sz="1200" b="0">
                 <a:solidFill>
                   <a:srgbClr val="102A43"/>
                 </a:solidFill>
-              </a:defRPr>
-            </a:pPr>
-            <a:r>
+                <a:latin typeface="Liberation Sans"/>
+              </a:rPr>
               <a:t>Következetes jelöléseket használ.</a:t>
             </a:r>
           </a:p>
@@ -4299,14 +4291,13 @@
           </a:bodyPr>
           <a:lstStyle/>
           <a:p>
-            <a:pPr>
-              <a:defRPr b="1" sz="1600">
+            <a:r>
+              <a:rPr sz="1600" b="1">
                 <a:solidFill>
                   <a:srgbClr val="0D47A1"/>
                 </a:solidFill>
-              </a:defRPr>
-            </a:pPr>
-            <a:r>
+                <a:latin typeface="Liberation Sans"/>
+              </a:rPr>
               <a:t>Mérhető</a:t>
             </a:r>
           </a:p>
@@ -4315,13 +4306,14 @@
               <a:spcBef>
                 <a:spcPts val="600"/>
               </a:spcBef>
-              <a:defRPr sz="1200">
+            </a:pPr>
+            <a:r>
+              <a:rPr sz="1200" b="0">
                 <a:solidFill>
                   <a:srgbClr val="102A43"/>
                 </a:solidFill>
-              </a:defRPr>
-            </a:pPr>
-            <a:r>
+                <a:latin typeface="Liberation Sans"/>
+              </a:rPr>
               <a:t>Az ellenőrzések eredményeit rögzíti.</a:t>
             </a:r>
           </a:p>
@@ -4394,14 +4386,13 @@
           </a:bodyPr>
           <a:lstStyle/>
           <a:p>
-            <a:pPr>
-              <a:defRPr b="1" sz="1600">
+            <a:r>
+              <a:rPr sz="1600" b="1">
                 <a:solidFill>
                   <a:srgbClr val="0D47A1"/>
                 </a:solidFill>
-              </a:defRPr>
-            </a:pPr>
-            <a:r>
+                <a:latin typeface="Liberation Sans"/>
+              </a:rPr>
               <a:t>Naprakész</a:t>
             </a:r>
           </a:p>
@@ -4410,13 +4401,14 @@
               <a:spcBef>
                 <a:spcPts val="600"/>
               </a:spcBef>
-              <a:defRPr sz="1200">
+            </a:pPr>
+            <a:r>
+              <a:rPr sz="1200" b="0">
                 <a:solidFill>
                   <a:srgbClr val="102A43"/>
                 </a:solidFill>
-              </a:defRPr>
-            </a:pPr>
-            <a:r>
+                <a:latin typeface="Liberation Sans"/>
+              </a:rPr>
               <a:t>A módosítások át vannak vezetve.</a:t>
             </a:r>
           </a:p>
@@ -4444,14 +4436,14 @@
           </a:bodyPr>
           <a:lstStyle/>
           <a:p>
-            <a:pPr algn="ctr">
-              <a:defRPr b="1" sz="1500">
+            <a:pPr algn="ctr"/>
+            <a:r>
+              <a:rPr sz="1500" b="1">
                 <a:solidFill>
                   <a:srgbClr val="0D47A1"/>
                 </a:solidFill>
-              </a:defRPr>
-            </a:pPr>
-            <a:r>
+                <a:latin typeface="Liberation Sans"/>
+              </a:rPr>
               <a:t>Következő hét: 31. hét - Hibakeresési módszerek</a:t>
             </a:r>
           </a:p>
@@ -4548,14 +4540,13 @@
           </a:bodyPr>
           <a:lstStyle/>
           <a:p>
-            <a:pPr>
-              <a:defRPr sz="900">
+            <a:r>
+              <a:rPr sz="900" b="0">
                 <a:solidFill>
                   <a:srgbClr val="52606D"/>
                 </a:solidFill>
-              </a:defRPr>
-            </a:pPr>
-            <a:r>
+                <a:latin typeface="Liberation Sans"/>
+              </a:rPr>
               <a:t>IAP - Integrált Automatika Program | Villamos szerelések 11.</a:t>
             </a:r>
           </a:p>
@@ -4583,14 +4574,13 @@
           </a:bodyPr>
           <a:lstStyle/>
           <a:p>
-            <a:pPr>
-              <a:defRPr b="1" sz="2700">
+            <a:r>
+              <a:rPr sz="2700" b="1">
                 <a:solidFill>
                   <a:srgbClr val="0D47A1"/>
                 </a:solidFill>
-              </a:defRPr>
-            </a:pPr>
-            <a:r>
+                <a:latin typeface="Liberation Sans"/>
+              </a:rPr>
               <a:t>Miért dokumentálunk?</a:t>
             </a:r>
           </a:p>
@@ -4663,14 +4653,13 @@
           </a:bodyPr>
           <a:lstStyle/>
           <a:p>
-            <a:pPr>
-              <a:defRPr b="1" sz="1600">
+            <a:r>
+              <a:rPr sz="1600" b="1">
                 <a:solidFill>
                   <a:srgbClr val="0D47A1"/>
                 </a:solidFill>
-              </a:defRPr>
-            </a:pPr>
-            <a:r>
+                <a:latin typeface="Liberation Sans"/>
+              </a:rPr>
               <a:t>Biztonság</a:t>
             </a:r>
           </a:p>
@@ -4679,13 +4668,14 @@
               <a:spcBef>
                 <a:spcPts val="600"/>
               </a:spcBef>
-              <a:defRPr sz="1200">
+            </a:pPr>
+            <a:r>
+              <a:rPr sz="1200" b="0">
                 <a:solidFill>
                   <a:srgbClr val="102A43"/>
                 </a:solidFill>
-              </a:defRPr>
-            </a:pPr>
-            <a:r>
+                <a:latin typeface="Liberation Sans"/>
+              </a:rPr>
               <a:t>A következő szakember tudja, mit talál a berendezésben.</a:t>
             </a:r>
           </a:p>
@@ -4758,14 +4748,13 @@
           </a:bodyPr>
           <a:lstStyle/>
           <a:p>
-            <a:pPr>
-              <a:defRPr b="1" sz="1600">
+            <a:r>
+              <a:rPr sz="1600" b="1">
                 <a:solidFill>
                   <a:srgbClr val="0D47A1"/>
                 </a:solidFill>
-              </a:defRPr>
-            </a:pPr>
-            <a:r>
+                <a:latin typeface="Liberation Sans"/>
+              </a:rPr>
               <a:t>Hibakeresés</a:t>
             </a:r>
           </a:p>
@@ -4774,13 +4763,14 @@
               <a:spcBef>
                 <a:spcPts val="600"/>
               </a:spcBef>
-              <a:defRPr sz="1200">
+            </a:pPr>
+            <a:r>
+              <a:rPr sz="1200" b="0">
                 <a:solidFill>
                   <a:srgbClr val="102A43"/>
                 </a:solidFill>
-              </a:defRPr>
-            </a:pPr>
-            <a:r>
+                <a:latin typeface="Liberation Sans"/>
+              </a:rPr>
               <a:t>A rajz lerövidíti a jelút és a hibás szakasz követését.</a:t>
             </a:r>
           </a:p>
@@ -4853,14 +4843,13 @@
           </a:bodyPr>
           <a:lstStyle/>
           <a:p>
-            <a:pPr>
-              <a:defRPr b="1" sz="1600">
+            <a:r>
+              <a:rPr sz="1600" b="1">
                 <a:solidFill>
                   <a:srgbClr val="0D47A1"/>
                 </a:solidFill>
-              </a:defRPr>
-            </a:pPr>
-            <a:r>
+                <a:latin typeface="Liberation Sans"/>
+              </a:rPr>
               <a:t>Karbantartás</a:t>
             </a:r>
           </a:p>
@@ -4869,13 +4858,14 @@
               <a:spcBef>
                 <a:spcPts val="600"/>
               </a:spcBef>
-              <a:defRPr sz="1200">
+            </a:pPr>
+            <a:r>
+              <a:rPr sz="1200" b="0">
                 <a:solidFill>
                   <a:srgbClr val="102A43"/>
                 </a:solidFill>
-              </a:defRPr>
-            </a:pPr>
-            <a:r>
+                <a:latin typeface="Liberation Sans"/>
+              </a:rPr>
               <a:t>A módosítások és cserék visszakövethetők.</a:t>
             </a:r>
           </a:p>
@@ -4948,14 +4938,13 @@
           </a:bodyPr>
           <a:lstStyle/>
           <a:p>
-            <a:pPr>
-              <a:defRPr b="1" sz="1600">
+            <a:r>
+              <a:rPr sz="1600" b="1">
                 <a:solidFill>
                   <a:srgbClr val="0D47A1"/>
                 </a:solidFill>
-              </a:defRPr>
-            </a:pPr>
-            <a:r>
+                <a:latin typeface="Liberation Sans"/>
+              </a:rPr>
               <a:t>Átadás</a:t>
             </a:r>
           </a:p>
@@ -4964,13 +4953,14 @@
               <a:spcBef>
                 <a:spcPts val="600"/>
               </a:spcBef>
-              <a:defRPr sz="1200">
+            </a:pPr>
+            <a:r>
+              <a:rPr sz="1200" b="0">
                 <a:solidFill>
                   <a:srgbClr val="102A43"/>
                 </a:solidFill>
-              </a:defRPr>
-            </a:pPr>
-            <a:r>
+                <a:latin typeface="Liberation Sans"/>
+              </a:rPr>
               <a:t>A kész munka nemcsak működik, hanem ellenőrizhető is.</a:t>
             </a:r>
           </a:p>
@@ -5067,14 +5057,13 @@
           </a:bodyPr>
           <a:lstStyle/>
           <a:p>
-            <a:pPr>
-              <a:defRPr sz="900">
+            <a:r>
+              <a:rPr sz="900" b="0">
                 <a:solidFill>
                   <a:srgbClr val="52606D"/>
                 </a:solidFill>
-              </a:defRPr>
-            </a:pPr>
-            <a:r>
+                <a:latin typeface="Liberation Sans"/>
+              </a:rPr>
               <a:t>IAP - Integrált Automatika Program | Villamos szerelések 11.</a:t>
             </a:r>
           </a:p>
@@ -5102,14 +5091,13 @@
           </a:bodyPr>
           <a:lstStyle/>
           <a:p>
-            <a:pPr>
-              <a:defRPr b="1" sz="2700">
+            <a:r>
+              <a:rPr sz="2700" b="1">
                 <a:solidFill>
                   <a:srgbClr val="0D47A1"/>
                 </a:solidFill>
-              </a:defRPr>
-            </a:pPr>
-            <a:r>
+                <a:latin typeface="Liberation Sans"/>
+              </a:rPr>
               <a:t>A dokumentációs csomag</a:t>
             </a:r>
           </a:p>
@@ -5182,14 +5170,13 @@
           </a:bodyPr>
           <a:lstStyle/>
           <a:p>
-            <a:pPr>
-              <a:defRPr b="1" sz="1600">
+            <a:r>
+              <a:rPr sz="1600" b="1">
                 <a:solidFill>
                   <a:srgbClr val="0D47A1"/>
                 </a:solidFill>
-              </a:defRPr>
-            </a:pPr>
-            <a:r>
+                <a:latin typeface="Liberation Sans"/>
+              </a:rPr>
               <a:t>01</a:t>
             </a:r>
           </a:p>
@@ -5198,13 +5185,14 @@
               <a:spcBef>
                 <a:spcPts val="600"/>
               </a:spcBef>
-              <a:defRPr sz="1200">
+            </a:pPr>
+            <a:r>
+              <a:rPr sz="1200" b="0">
                 <a:solidFill>
                   <a:srgbClr val="102A43"/>
                 </a:solidFill>
-              </a:defRPr>
-            </a:pPr>
-            <a:r>
+                <a:latin typeface="Liberation Sans"/>
+              </a:rPr>
               <a:t>Kapcsolási rajz</a:t>
             </a:r>
           </a:p>
@@ -5277,14 +5265,13 @@
           </a:bodyPr>
           <a:lstStyle/>
           <a:p>
-            <a:pPr>
-              <a:defRPr b="1" sz="1600">
+            <a:r>
+              <a:rPr sz="1600" b="1">
                 <a:solidFill>
                   <a:srgbClr val="0D47A1"/>
                 </a:solidFill>
-              </a:defRPr>
-            </a:pPr>
-            <a:r>
+                <a:latin typeface="Liberation Sans"/>
+              </a:rPr>
               <a:t>02</a:t>
             </a:r>
           </a:p>
@@ -5293,13 +5280,14 @@
               <a:spcBef>
                 <a:spcPts val="600"/>
               </a:spcBef>
-              <a:defRPr sz="1200">
+            </a:pPr>
+            <a:r>
+              <a:rPr sz="1200" b="0">
                 <a:solidFill>
                   <a:srgbClr val="102A43"/>
                 </a:solidFill>
-              </a:defRPr>
-            </a:pPr>
-            <a:r>
+                <a:latin typeface="Liberation Sans"/>
+              </a:rPr>
               <a:t>Szerelési / elrendezési rajz</a:t>
             </a:r>
           </a:p>
@@ -5372,14 +5360,13 @@
           </a:bodyPr>
           <a:lstStyle/>
           <a:p>
-            <a:pPr>
-              <a:defRPr b="1" sz="1600">
+            <a:r>
+              <a:rPr sz="1600" b="1">
                 <a:solidFill>
                   <a:srgbClr val="0D47A1"/>
                 </a:solidFill>
-              </a:defRPr>
-            </a:pPr>
-            <a:r>
+                <a:latin typeface="Liberation Sans"/>
+              </a:rPr>
               <a:t>03</a:t>
             </a:r>
           </a:p>
@@ -5388,13 +5375,14 @@
               <a:spcBef>
                 <a:spcPts val="600"/>
               </a:spcBef>
-              <a:defRPr sz="1200">
+            </a:pPr>
+            <a:r>
+              <a:rPr sz="1200" b="0">
                 <a:solidFill>
                   <a:srgbClr val="102A43"/>
                 </a:solidFill>
-              </a:defRPr>
-            </a:pPr>
-            <a:r>
+                <a:latin typeface="Liberation Sans"/>
+              </a:rPr>
               <a:t>Kapocs- és vezetékjegyzék</a:t>
             </a:r>
           </a:p>
@@ -5467,14 +5455,13 @@
           </a:bodyPr>
           <a:lstStyle/>
           <a:p>
-            <a:pPr>
-              <a:defRPr b="1" sz="1600">
+            <a:r>
+              <a:rPr sz="1600" b="1">
                 <a:solidFill>
                   <a:srgbClr val="0D47A1"/>
                 </a:solidFill>
-              </a:defRPr>
-            </a:pPr>
-            <a:r>
+                <a:latin typeface="Liberation Sans"/>
+              </a:rPr>
               <a:t>04</a:t>
             </a:r>
           </a:p>
@@ -5483,13 +5470,14 @@
               <a:spcBef>
                 <a:spcPts val="600"/>
               </a:spcBef>
-              <a:defRPr sz="1200">
+            </a:pPr>
+            <a:r>
+              <a:rPr sz="1200" b="0">
                 <a:solidFill>
                   <a:srgbClr val="102A43"/>
                 </a:solidFill>
-              </a:defRPr>
-            </a:pPr>
-            <a:r>
+                <a:latin typeface="Liberation Sans"/>
+              </a:rPr>
               <a:t>Darabjegyzék</a:t>
             </a:r>
           </a:p>
@@ -5562,14 +5550,13 @@
           </a:bodyPr>
           <a:lstStyle/>
           <a:p>
-            <a:pPr>
-              <a:defRPr b="1" sz="1600">
+            <a:r>
+              <a:rPr sz="1600" b="1">
                 <a:solidFill>
                   <a:srgbClr val="0D47A1"/>
                 </a:solidFill>
-              </a:defRPr>
-            </a:pPr>
-            <a:r>
+                <a:latin typeface="Liberation Sans"/>
+              </a:rPr>
               <a:t>05</a:t>
             </a:r>
           </a:p>
@@ -5578,13 +5565,14 @@
               <a:spcBef>
                 <a:spcPts val="600"/>
               </a:spcBef>
-              <a:defRPr sz="1200">
+            </a:pPr>
+            <a:r>
+              <a:rPr sz="1200" b="0">
                 <a:solidFill>
                   <a:srgbClr val="102A43"/>
                 </a:solidFill>
-              </a:defRPr>
-            </a:pPr>
-            <a:r>
+                <a:latin typeface="Liberation Sans"/>
+              </a:rPr>
               <a:t>Mérési jegyzőkönyv</a:t>
             </a:r>
           </a:p>
@@ -5657,14 +5645,13 @@
           </a:bodyPr>
           <a:lstStyle/>
           <a:p>
-            <a:pPr>
-              <a:defRPr b="1" sz="1600">
+            <a:r>
+              <a:rPr sz="1600" b="1">
                 <a:solidFill>
                   <a:srgbClr val="0D47A1"/>
                 </a:solidFill>
-              </a:defRPr>
-            </a:pPr>
-            <a:r>
+                <a:latin typeface="Liberation Sans"/>
+              </a:rPr>
               <a:t>06</a:t>
             </a:r>
           </a:p>
@@ -5673,13 +5660,14 @@
               <a:spcBef>
                 <a:spcPts val="600"/>
               </a:spcBef>
-              <a:defRPr sz="1200">
+            </a:pPr>
+            <a:r>
+              <a:rPr sz="1200" b="0">
                 <a:solidFill>
                   <a:srgbClr val="102A43"/>
                 </a:solidFill>
-              </a:defRPr>
-            </a:pPr>
-            <a:r>
+                <a:latin typeface="Liberation Sans"/>
+              </a:rPr>
               <a:t>Módosítási napló</a:t>
             </a:r>
           </a:p>
@@ -5776,14 +5764,13 @@
           </a:bodyPr>
           <a:lstStyle/>
           <a:p>
-            <a:pPr>
-              <a:defRPr sz="900">
+            <a:r>
+              <a:rPr sz="900" b="0">
                 <a:solidFill>
                   <a:srgbClr val="52606D"/>
                 </a:solidFill>
-              </a:defRPr>
-            </a:pPr>
-            <a:r>
+                <a:latin typeface="Liberation Sans"/>
+              </a:rPr>
               <a:t>IAP - Integrált Automatika Program | Villamos szerelések 11.</a:t>
             </a:r>
           </a:p>
@@ -5811,14 +5798,13 @@
           </a:bodyPr>
           <a:lstStyle/>
           <a:p>
-            <a:pPr>
-              <a:defRPr b="1" sz="2700">
+            <a:r>
+              <a:rPr sz="2700" b="1">
                 <a:solidFill>
                   <a:srgbClr val="0D47A1"/>
                 </a:solidFill>
-              </a:defRPr>
-            </a:pPr>
-            <a:r>
+                <a:latin typeface="Liberation Sans"/>
+              </a:rPr>
               <a:t>Rajz ↔ valós berendezés</a:t>
             </a:r>
           </a:p>
@@ -5846,14 +5832,13 @@
           </a:bodyPr>
           <a:lstStyle/>
           <a:p>
-            <a:pPr>
-              <a:defRPr sz="1300">
+            <a:r>
+              <a:rPr sz="1300" b="0">
                 <a:solidFill>
                   <a:srgbClr val="52606D"/>
                 </a:solidFill>
-              </a:defRPr>
-            </a:pPr>
-            <a:r>
+                <a:latin typeface="Liberation Sans"/>
+              </a:rPr>
               <a:t>A dokumentáció akkor jó, ha ugyanazt a rendszert írja le</a:t>
             </a:r>
           </a:p>
@@ -5926,14 +5911,13 @@
           </a:bodyPr>
           <a:lstStyle/>
           <a:p>
-            <a:pPr>
-              <a:defRPr b="1" sz="1600">
+            <a:r>
+              <a:rPr sz="1600" b="1">
                 <a:solidFill>
                   <a:srgbClr val="0D47A1"/>
                 </a:solidFill>
-              </a:defRPr>
-            </a:pPr>
-            <a:r>
+                <a:latin typeface="Liberation Sans"/>
+              </a:rPr>
               <a:t>RAJZ</a:t>
             </a:r>
           </a:p>
@@ -5942,18 +5926,16 @@
               <a:spcBef>
                 <a:spcPts val="600"/>
               </a:spcBef>
-              <a:defRPr sz="1200">
+            </a:pPr>
+            <a:r>
+              <a:rPr sz="1200" b="0">
                 <a:solidFill>
                   <a:srgbClr val="102A43"/>
                 </a:solidFill>
-              </a:defRPr>
-            </a:pPr>
-            <a:r>
-              <a:t>Q1 → K1 → X1:1</a:t>
-            </a:r>
-            <a:br/>
-            <a:r>
-              <a:t>Azonosítók és kapcsok</a:t>
+                <a:latin typeface="Liberation Sans"/>
+              </a:rPr>
+              <a:t>Q1 → K1 → X1:1
+Azonosítók és kapcsok</a:t>
             </a:r>
           </a:p>
         </p:txBody>
@@ -6025,14 +6007,13 @@
           </a:bodyPr>
           <a:lstStyle/>
           <a:p>
-            <a:pPr>
-              <a:defRPr b="1" sz="1600">
+            <a:r>
+              <a:rPr sz="1600" b="1">
                 <a:solidFill>
                   <a:srgbClr val="0D47A1"/>
                 </a:solidFill>
-              </a:defRPr>
-            </a:pPr>
-            <a:r>
+                <a:latin typeface="Liberation Sans"/>
+              </a:rPr>
               <a:t>VALÓSÁG</a:t>
             </a:r>
           </a:p>
@@ -6041,18 +6022,16 @@
               <a:spcBef>
                 <a:spcPts val="600"/>
               </a:spcBef>
-              <a:defRPr sz="1200">
+            </a:pPr>
+            <a:r>
+              <a:rPr sz="1200" b="0">
                 <a:solidFill>
                   <a:srgbClr val="102A43"/>
                 </a:solidFill>
-              </a:defRPr>
-            </a:pPr>
-            <a:r>
-              <a:t>Feliratozott készülékek</a:t>
-            </a:r>
-            <a:br/>
-            <a:r>
-              <a:t>Azonos vezeték- és kapocsjelek</a:t>
+                <a:latin typeface="Liberation Sans"/>
+              </a:rPr>
+              <a:t>Feliratozott készülékek
+Azonos vezeték- és kapocsjelek</a:t>
             </a:r>
           </a:p>
         </p:txBody>
@@ -6124,14 +6103,13 @@
           </a:bodyPr>
           <a:lstStyle/>
           <a:p>
-            <a:pPr>
-              <a:defRPr b="1" sz="1600">
+            <a:r>
+              <a:rPr sz="1600" b="1">
                 <a:solidFill>
                   <a:srgbClr val="0D47A1"/>
                 </a:solidFill>
-              </a:defRPr>
-            </a:pPr>
-            <a:r>
+                <a:latin typeface="Liberation Sans"/>
+              </a:rPr>
               <a:t>ELLENŐRZÉS</a:t>
             </a:r>
           </a:p>
@@ -6140,18 +6118,16 @@
               <a:spcBef>
                 <a:spcPts val="600"/>
               </a:spcBef>
-              <a:defRPr sz="1200">
+            </a:pPr>
+            <a:r>
+              <a:rPr sz="1200" b="0">
                 <a:solidFill>
                   <a:srgbClr val="102A43"/>
                 </a:solidFill>
-              </a:defRPr>
-            </a:pPr>
-            <a:r>
-              <a:t>Egyezés?</a:t>
-            </a:r>
-            <a:br/>
-            <a:r>
-              <a:t>Eltérés esetén javítás és dokumentált módosítás</a:t>
+                <a:latin typeface="Liberation Sans"/>
+              </a:rPr>
+              <a:t>Egyezés?
+Eltérés esetén javítás és dokumentált módosítás</a:t>
             </a:r>
           </a:p>
         </p:txBody>
@@ -6247,14 +6223,13 @@
           </a:bodyPr>
           <a:lstStyle/>
           <a:p>
-            <a:pPr>
-              <a:defRPr sz="900">
+            <a:r>
+              <a:rPr sz="900" b="0">
                 <a:solidFill>
                   <a:srgbClr val="52606D"/>
                 </a:solidFill>
-              </a:defRPr>
-            </a:pPr>
-            <a:r>
+                <a:latin typeface="Liberation Sans"/>
+              </a:rPr>
               <a:t>IAP - Integrált Automatika Program | Villamos szerelések 11.</a:t>
             </a:r>
           </a:p>
@@ -6282,14 +6257,13 @@
           </a:bodyPr>
           <a:lstStyle/>
           <a:p>
-            <a:pPr>
-              <a:defRPr b="1" sz="2700">
+            <a:r>
+              <a:rPr sz="2700" b="1">
                 <a:solidFill>
                   <a:srgbClr val="0D47A1"/>
                 </a:solidFill>
-              </a:defRPr>
-            </a:pPr>
-            <a:r>
+                <a:latin typeface="Liberation Sans"/>
+              </a:rPr>
               <a:t>Jelölési fegyelem</a:t>
             </a:r>
           </a:p>
@@ -6362,14 +6336,13 @@
           </a:bodyPr>
           <a:lstStyle/>
           <a:p>
-            <a:pPr>
-              <a:defRPr b="1" sz="1600">
+            <a:r>
+              <a:rPr sz="1600" b="1">
                 <a:solidFill>
                   <a:srgbClr val="0D47A1"/>
                 </a:solidFill>
-              </a:defRPr>
-            </a:pPr>
-            <a:r>
+                <a:latin typeface="Liberation Sans"/>
+              </a:rPr>
               <a:t>Készülék</a:t>
             </a:r>
           </a:p>
@@ -6378,13 +6351,14 @@
               <a:spcBef>
                 <a:spcPts val="600"/>
               </a:spcBef>
-              <a:defRPr sz="1200">
+            </a:pPr>
+            <a:r>
+              <a:rPr sz="1200" b="0">
                 <a:solidFill>
                   <a:srgbClr val="102A43"/>
                 </a:solidFill>
-              </a:defRPr>
-            </a:pPr>
-            <a:r>
+                <a:latin typeface="Liberation Sans"/>
+              </a:rPr>
               <a:t>Egy elem = egy azonosító minden dokumentumban.</a:t>
             </a:r>
           </a:p>
@@ -6457,14 +6431,13 @@
           </a:bodyPr>
           <a:lstStyle/>
           <a:p>
-            <a:pPr>
-              <a:defRPr b="1" sz="1600">
+            <a:r>
+              <a:rPr sz="1600" b="1">
                 <a:solidFill>
                   <a:srgbClr val="0D47A1"/>
                 </a:solidFill>
-              </a:defRPr>
-            </a:pPr>
-            <a:r>
+                <a:latin typeface="Liberation Sans"/>
+              </a:rPr>
               <a:t>Kapocs</a:t>
             </a:r>
           </a:p>
@@ -6473,13 +6446,14 @@
               <a:spcBef>
                 <a:spcPts val="600"/>
               </a:spcBef>
-              <a:defRPr sz="1200">
+            </a:pPr>
+            <a:r>
+              <a:rPr sz="1200" b="0">
                 <a:solidFill>
                   <a:srgbClr val="102A43"/>
                 </a:solidFill>
-              </a:defRPr>
-            </a:pPr>
-            <a:r>
+                <a:latin typeface="Liberation Sans"/>
+              </a:rPr>
               <a:t>A bekötési pont egyértelműen visszakereshető.</a:t>
             </a:r>
           </a:p>
@@ -6552,14 +6526,13 @@
           </a:bodyPr>
           <a:lstStyle/>
           <a:p>
-            <a:pPr>
-              <a:defRPr b="1" sz="1600">
+            <a:r>
+              <a:rPr sz="1600" b="1">
                 <a:solidFill>
                   <a:srgbClr val="0D47A1"/>
                 </a:solidFill>
-              </a:defRPr>
-            </a:pPr>
-            <a:r>
+                <a:latin typeface="Liberation Sans"/>
+              </a:rPr>
               <a:t>Vezeték</a:t>
             </a:r>
           </a:p>
@@ -6568,13 +6541,14 @@
               <a:spcBef>
                 <a:spcPts val="600"/>
               </a:spcBef>
-              <a:defRPr sz="1200">
+            </a:pPr>
+            <a:r>
+              <a:rPr sz="1200" b="0">
                 <a:solidFill>
                   <a:srgbClr val="102A43"/>
                 </a:solidFill>
-              </a:defRPr>
-            </a:pPr>
-            <a:r>
+                <a:latin typeface="Liberation Sans"/>
+              </a:rPr>
               <a:t>A vezeték két vége ugyanahhoz az áramköri kapcsolathoz vezet.</a:t>
             </a:r>
           </a:p>
@@ -6647,14 +6621,13 @@
           </a:bodyPr>
           <a:lstStyle/>
           <a:p>
-            <a:pPr>
-              <a:defRPr b="1" sz="1600">
+            <a:r>
+              <a:rPr sz="1600" b="1">
                 <a:solidFill>
                   <a:srgbClr val="0D47A1"/>
                 </a:solidFill>
-              </a:defRPr>
-            </a:pPr>
-            <a:r>
+                <a:latin typeface="Liberation Sans"/>
+              </a:rPr>
               <a:t>Kábel</a:t>
             </a:r>
           </a:p>
@@ -6663,13 +6636,14 @@
               <a:spcBef>
                 <a:spcPts val="600"/>
               </a:spcBef>
-              <a:defRPr sz="1200">
+            </a:pPr>
+            <a:r>
+              <a:rPr sz="1200" b="0">
                 <a:solidFill>
                   <a:srgbClr val="102A43"/>
                 </a:solidFill>
-              </a:defRPr>
-            </a:pPr>
-            <a:r>
+                <a:latin typeface="Liberation Sans"/>
+              </a:rPr>
               <a:t>A kábel és erei külön is azonosíthatók.</a:t>
             </a:r>
           </a:p>
@@ -6766,14 +6740,13 @@
           </a:bodyPr>
           <a:lstStyle/>
           <a:p>
-            <a:pPr>
-              <a:defRPr sz="900">
+            <a:r>
+              <a:rPr sz="900" b="0">
                 <a:solidFill>
                   <a:srgbClr val="52606D"/>
                 </a:solidFill>
-              </a:defRPr>
-            </a:pPr>
-            <a:r>
+                <a:latin typeface="Liberation Sans"/>
+              </a:rPr>
               <a:t>IAP - Integrált Automatika Program | Villamos szerelések 11.</a:t>
             </a:r>
           </a:p>
@@ -6801,14 +6774,13 @@
           </a:bodyPr>
           <a:lstStyle/>
           <a:p>
-            <a:pPr>
-              <a:defRPr b="1" sz="2700">
+            <a:r>
+              <a:rPr sz="2700" b="1">
                 <a:solidFill>
                   <a:srgbClr val="0D47A1"/>
                 </a:solidFill>
-              </a:defRPr>
-            </a:pPr>
-            <a:r>
+                <a:latin typeface="Liberation Sans"/>
+              </a:rPr>
               <a:t>Dokumentálási munkafolyamat</a:t>
             </a:r>
           </a:p>
@@ -6881,19 +6853,16 @@
           </a:bodyPr>
           <a:lstStyle/>
           <a:p>
-            <a:pPr algn="ctr">
-              <a:defRPr sz="1100" b="1">
+            <a:pPr algn="ctr"/>
+            <a:r>
+              <a:rPr sz="1100" b="1">
                 <a:solidFill>
                   <a:srgbClr val="0D47A1"/>
                 </a:solidFill>
-              </a:defRPr>
-            </a:pPr>
-            <a:r>
-              <a:t>1.</a:t>
-            </a:r>
-            <a:br/>
-            <a:r>
-              <a:t>Azonosítás</a:t>
+                <a:latin typeface="Liberation Sans"/>
+              </a:rPr>
+              <a:t>1.
+Azonosítás</a:t>
             </a:r>
           </a:p>
         </p:txBody>
@@ -6965,19 +6934,16 @@
           </a:bodyPr>
           <a:lstStyle/>
           <a:p>
-            <a:pPr algn="ctr">
-              <a:defRPr sz="1100" b="1">
+            <a:pPr algn="ctr"/>
+            <a:r>
+              <a:rPr sz="1100" b="1">
                 <a:solidFill>
                   <a:srgbClr val="0D47A1"/>
                 </a:solidFill>
-              </a:defRPr>
-            </a:pPr>
-            <a:r>
-              <a:t>2.</a:t>
-            </a:r>
-            <a:br/>
-            <a:r>
-              <a:t>Rajz ellenőrzése</a:t>
+                <a:latin typeface="Liberation Sans"/>
+              </a:rPr>
+              <a:t>2.
+Rajz ellenőrzése</a:t>
             </a:r>
           </a:p>
         </p:txBody>
@@ -7049,19 +7015,16 @@
           </a:bodyPr>
           <a:lstStyle/>
           <a:p>
-            <a:pPr algn="ctr">
-              <a:defRPr sz="1100" b="1">
+            <a:pPr algn="ctr"/>
+            <a:r>
+              <a:rPr sz="1100" b="1">
                 <a:solidFill>
                   <a:srgbClr val="0D47A1"/>
                 </a:solidFill>
-              </a:defRPr>
-            </a:pPr>
-            <a:r>
-              <a:t>3.</a:t>
-            </a:r>
-            <a:br/>
-            <a:r>
-              <a:t>Szerelés + jelölés</a:t>
+                <a:latin typeface="Liberation Sans"/>
+              </a:rPr>
+              <a:t>3.
+Szerelés + jelölés</a:t>
             </a:r>
           </a:p>
         </p:txBody>
@@ -7133,19 +7096,16 @@
           </a:bodyPr>
           <a:lstStyle/>
           <a:p>
-            <a:pPr algn="ctr">
-              <a:defRPr sz="1100" b="1">
+            <a:pPr algn="ctr"/>
+            <a:r>
+              <a:rPr sz="1100" b="1">
                 <a:solidFill>
                   <a:srgbClr val="0D47A1"/>
                 </a:solidFill>
-              </a:defRPr>
-            </a:pPr>
-            <a:r>
-              <a:t>4.</a:t>
-            </a:r>
-            <a:br/>
-            <a:r>
-              <a:t>Eltérés átvezetése</a:t>
+                <a:latin typeface="Liberation Sans"/>
+              </a:rPr>
+              <a:t>4.
+Eltérés átvezetése</a:t>
             </a:r>
           </a:p>
         </p:txBody>
@@ -7217,19 +7177,16 @@
           </a:bodyPr>
           <a:lstStyle/>
           <a:p>
-            <a:pPr algn="ctr">
-              <a:defRPr sz="1100" b="1">
+            <a:pPr algn="ctr"/>
+            <a:r>
+              <a:rPr sz="1100" b="1">
                 <a:solidFill>
                   <a:srgbClr val="0D47A1"/>
                 </a:solidFill>
-              </a:defRPr>
-            </a:pPr>
-            <a:r>
-              <a:t>5.</a:t>
-            </a:r>
-            <a:br/>
-            <a:r>
-              <a:t>Mérés</a:t>
+                <a:latin typeface="Liberation Sans"/>
+              </a:rPr>
+              <a:t>5.
+Mérés</a:t>
             </a:r>
           </a:p>
         </p:txBody>
@@ -7301,19 +7258,16 @@
           </a:bodyPr>
           <a:lstStyle/>
           <a:p>
-            <a:pPr algn="ctr">
-              <a:defRPr sz="1100" b="1">
+            <a:pPr algn="ctr"/>
+            <a:r>
+              <a:rPr sz="1100" b="1">
                 <a:solidFill>
                   <a:srgbClr val="0D47A1"/>
                 </a:solidFill>
-              </a:defRPr>
-            </a:pPr>
-            <a:r>
-              <a:t>6.</a:t>
-            </a:r>
-            <a:br/>
-            <a:r>
-              <a:t>Dátum + készítő</a:t>
+                <a:latin typeface="Liberation Sans"/>
+              </a:rPr>
+              <a:t>6.
+Dátum + készítő</a:t>
             </a:r>
           </a:p>
         </p:txBody>
@@ -7385,19 +7339,16 @@
           </a:bodyPr>
           <a:lstStyle/>
           <a:p>
-            <a:pPr algn="ctr">
-              <a:defRPr sz="1100" b="1">
+            <a:pPr algn="ctr"/>
+            <a:r>
+              <a:rPr sz="1100" b="1">
                 <a:solidFill>
                   <a:srgbClr val="0D47A1"/>
                 </a:solidFill>
-              </a:defRPr>
-            </a:pPr>
-            <a:r>
-              <a:t>7.</a:t>
-            </a:r>
-            <a:br/>
-            <a:r>
-              <a:t>Átadás</a:t>
+                <a:latin typeface="Liberation Sans"/>
+              </a:rPr>
+              <a:t>7.
+Átadás</a:t>
             </a:r>
           </a:p>
         </p:txBody>
@@ -7493,14 +7444,13 @@
           </a:bodyPr>
           <a:lstStyle/>
           <a:p>
-            <a:pPr>
-              <a:defRPr sz="900">
+            <a:r>
+              <a:rPr sz="900" b="0">
                 <a:solidFill>
                   <a:srgbClr val="52606D"/>
                 </a:solidFill>
-              </a:defRPr>
-            </a:pPr>
-            <a:r>
+                <a:latin typeface="Liberation Sans"/>
+              </a:rPr>
               <a:t>IAP - Integrált Automatika Program | Villamos szerelések 11.</a:t>
             </a:r>
           </a:p>
@@ -7528,14 +7478,13 @@
           </a:bodyPr>
           <a:lstStyle/>
           <a:p>
-            <a:pPr>
-              <a:defRPr b="1" sz="2700">
+            <a:r>
+              <a:rPr sz="2700" b="1">
                 <a:solidFill>
                   <a:srgbClr val="0D47A1"/>
                 </a:solidFill>
-              </a:defRPr>
-            </a:pPr>
-            <a:r>
+                <a:latin typeface="Liberation Sans"/>
+              </a:rPr>
               <a:t>Mérési jegyzőkönyv - mit rögzítünk?</a:t>
             </a:r>
           </a:p>
@@ -7608,14 +7557,13 @@
           </a:bodyPr>
           <a:lstStyle/>
           <a:p>
-            <a:pPr>
-              <a:defRPr b="1" sz="1600">
+            <a:r>
+              <a:rPr sz="1600" b="1">
                 <a:solidFill>
                   <a:srgbClr val="0D47A1"/>
                 </a:solidFill>
-              </a:defRPr>
-            </a:pPr>
-            <a:r>
+                <a:latin typeface="Liberation Sans"/>
+              </a:rPr>
               <a:t>Mit?</a:t>
             </a:r>
           </a:p>
@@ -7624,13 +7572,14 @@
               <a:spcBef>
                 <a:spcPts val="600"/>
               </a:spcBef>
-              <a:defRPr sz="1200">
+            </a:pPr>
+            <a:r>
+              <a:rPr sz="1200" b="0">
                 <a:solidFill>
                   <a:srgbClr val="102A43"/>
                 </a:solidFill>
-              </a:defRPr>
-            </a:pPr>
-            <a:r>
+                <a:latin typeface="Liberation Sans"/>
+              </a:rPr>
               <a:t>A mérés megnevezése és mérési pont.</a:t>
             </a:r>
           </a:p>
@@ -7703,14 +7652,13 @@
           </a:bodyPr>
           <a:lstStyle/>
           <a:p>
-            <a:pPr>
-              <a:defRPr b="1" sz="1600">
+            <a:r>
+              <a:rPr sz="1600" b="1">
                 <a:solidFill>
                   <a:srgbClr val="0D47A1"/>
                 </a:solidFill>
-              </a:defRPr>
-            </a:pPr>
-            <a:r>
+                <a:latin typeface="Liberation Sans"/>
+              </a:rPr>
               <a:t>Mivel?</a:t>
             </a:r>
           </a:p>
@@ -7719,13 +7667,14 @@
               <a:spcBef>
                 <a:spcPts val="600"/>
               </a:spcBef>
-              <a:defRPr sz="1200">
+            </a:pPr>
+            <a:r>
+              <a:rPr sz="1200" b="0">
                 <a:solidFill>
                   <a:srgbClr val="102A43"/>
                 </a:solidFill>
-              </a:defRPr>
-            </a:pPr>
-            <a:r>
+                <a:latin typeface="Liberation Sans"/>
+              </a:rPr>
               <a:t>Műszer típusa / azonosítója.</a:t>
             </a:r>
           </a:p>
@@ -7798,14 +7747,13 @@
           </a:bodyPr>
           <a:lstStyle/>
           <a:p>
-            <a:pPr>
-              <a:defRPr b="1" sz="1600">
+            <a:r>
+              <a:rPr sz="1600" b="1">
                 <a:solidFill>
                   <a:srgbClr val="0D47A1"/>
                 </a:solidFill>
-              </a:defRPr>
-            </a:pPr>
-            <a:r>
+                <a:latin typeface="Liberation Sans"/>
+              </a:rPr>
               <a:t>Mennyi?</a:t>
             </a:r>
           </a:p>
@@ -7814,13 +7762,14 @@
               <a:spcBef>
                 <a:spcPts val="600"/>
               </a:spcBef>
-              <a:defRPr sz="1200">
+            </a:pPr>
+            <a:r>
+              <a:rPr sz="1200" b="0">
                 <a:solidFill>
                   <a:srgbClr val="102A43"/>
                 </a:solidFill>
-              </a:defRPr>
-            </a:pPr>
-            <a:r>
+                <a:latin typeface="Liberation Sans"/>
+              </a:rPr>
               <a:t>Mért érték + mértékegység.</a:t>
             </a:r>
           </a:p>
@@ -7893,14 +7842,13 @@
           </a:bodyPr>
           <a:lstStyle/>
           <a:p>
-            <a:pPr>
-              <a:defRPr b="1" sz="1600">
+            <a:r>
+              <a:rPr sz="1600" b="1">
                 <a:solidFill>
                   <a:srgbClr val="0D47A1"/>
                 </a:solidFill>
-              </a:defRPr>
-            </a:pPr>
-            <a:r>
+                <a:latin typeface="Liberation Sans"/>
+              </a:rPr>
               <a:t>Mikor?</a:t>
             </a:r>
           </a:p>
@@ -7909,13 +7857,14 @@
               <a:spcBef>
                 <a:spcPts val="600"/>
               </a:spcBef>
-              <a:defRPr sz="1200">
+            </a:pPr>
+            <a:r>
+              <a:rPr sz="1200" b="0">
                 <a:solidFill>
                   <a:srgbClr val="102A43"/>
                 </a:solidFill>
-              </a:defRPr>
-            </a:pPr>
-            <a:r>
+                <a:latin typeface="Liberation Sans"/>
+              </a:rPr>
               <a:t>Dátum és körülmények.</a:t>
             </a:r>
           </a:p>
@@ -7988,14 +7937,13 @@
           </a:bodyPr>
           <a:lstStyle/>
           <a:p>
-            <a:pPr>
-              <a:defRPr b="1" sz="1600">
+            <a:r>
+              <a:rPr sz="1600" b="1">
                 <a:solidFill>
                   <a:srgbClr val="0D47A1"/>
                 </a:solidFill>
-              </a:defRPr>
-            </a:pPr>
-            <a:r>
+                <a:latin typeface="Liberation Sans"/>
+              </a:rPr>
               <a:t>Ki?</a:t>
             </a:r>
           </a:p>
@@ -8004,13 +7952,14 @@
               <a:spcBef>
                 <a:spcPts val="600"/>
               </a:spcBef>
-              <a:defRPr sz="1200">
+            </a:pPr>
+            <a:r>
+              <a:rPr sz="1200" b="0">
                 <a:solidFill>
                   <a:srgbClr val="102A43"/>
                 </a:solidFill>
-              </a:defRPr>
-            </a:pPr>
-            <a:r>
+                <a:latin typeface="Liberation Sans"/>
+              </a:rPr>
               <a:t>Mérést végző / ellenőrző.</a:t>
             </a:r>
           </a:p>
@@ -8083,14 +8032,13 @@
           </a:bodyPr>
           <a:lstStyle/>
           <a:p>
-            <a:pPr>
-              <a:defRPr b="1" sz="1600">
+            <a:r>
+              <a:rPr sz="1600" b="1">
                 <a:solidFill>
                   <a:srgbClr val="0D47A1"/>
                 </a:solidFill>
-              </a:defRPr>
-            </a:pPr>
-            <a:r>
+                <a:latin typeface="Liberation Sans"/>
+              </a:rPr>
               <a:t>Eredmény</a:t>
             </a:r>
           </a:p>
@@ -8099,13 +8047,14 @@
               <a:spcBef>
                 <a:spcPts val="600"/>
               </a:spcBef>
-              <a:defRPr sz="1200">
+            </a:pPr>
+            <a:r>
+              <a:rPr sz="1200" b="0">
                 <a:solidFill>
                   <a:srgbClr val="102A43"/>
                 </a:solidFill>
-              </a:defRPr>
-            </a:pPr>
-            <a:r>
+                <a:latin typeface="Liberation Sans"/>
+              </a:rPr>
               <a:t>Megfelelt / további vizsgálat szükséges.</a:t>
             </a:r>
           </a:p>
@@ -8202,14 +8151,13 @@
           </a:bodyPr>
           <a:lstStyle/>
           <a:p>
-            <a:pPr>
-              <a:defRPr sz="900">
+            <a:r>
+              <a:rPr sz="900" b="0">
                 <a:solidFill>
                   <a:srgbClr val="52606D"/>
                 </a:solidFill>
-              </a:defRPr>
-            </a:pPr>
-            <a:r>
+                <a:latin typeface="Liberation Sans"/>
+              </a:rPr>
               <a:t>IAP - Integrált Automatika Program | Villamos szerelések 11.</a:t>
             </a:r>
           </a:p>
@@ -8237,14 +8185,13 @@
           </a:bodyPr>
           <a:lstStyle/>
           <a:p>
-            <a:pPr>
-              <a:defRPr b="1" sz="2700">
+            <a:r>
+              <a:rPr sz="2700" b="1">
                 <a:solidFill>
                   <a:srgbClr val="0D47A1"/>
                 </a:solidFill>
-              </a:defRPr>
-            </a:pPr>
-            <a:r>
+                <a:latin typeface="Liberation Sans"/>
+              </a:rPr>
               <a:t>Tipikus dokumentációs hibák</a:t>
             </a:r>
           </a:p>
@@ -8317,14 +8264,13 @@
           </a:bodyPr>
           <a:lstStyle/>
           <a:p>
-            <a:pPr>
-              <a:defRPr b="1" sz="1600">
+            <a:r>
+              <a:rPr sz="1600" b="1">
                 <a:solidFill>
                   <a:srgbClr val="0D47A1"/>
                 </a:solidFill>
-              </a:defRPr>
-            </a:pPr>
-            <a:r>
+                <a:latin typeface="Liberation Sans"/>
+              </a:rPr>
               <a:t>ELAVULT RAJZ</a:t>
             </a:r>
           </a:p>
@@ -8333,13 +8279,14 @@
               <a:spcBef>
                 <a:spcPts val="600"/>
               </a:spcBef>
-              <a:defRPr sz="1200">
+            </a:pPr>
+            <a:r>
+              <a:rPr sz="1200" b="0">
                 <a:solidFill>
                   <a:srgbClr val="102A43"/>
                 </a:solidFill>
-              </a:defRPr>
-            </a:pPr>
-            <a:r>
+                <a:latin typeface="Liberation Sans"/>
+              </a:rPr>
               <a:t>A valós bekötés már más.</a:t>
             </a:r>
           </a:p>
@@ -8412,14 +8359,13 @@
           </a:bodyPr>
           <a:lstStyle/>
           <a:p>
-            <a:pPr>
-              <a:defRPr b="1" sz="1600">
+            <a:r>
+              <a:rPr sz="1600" b="1">
                 <a:solidFill>
                   <a:srgbClr val="0D47A1"/>
                 </a:solidFill>
-              </a:defRPr>
-            </a:pPr>
-            <a:r>
+                <a:latin typeface="Liberation Sans"/>
+              </a:rPr>
               <a:t>HIÁNYZÓ JELÖLÉS</a:t>
             </a:r>
           </a:p>
@@ -8428,13 +8374,14 @@
               <a:spcBef>
                 <a:spcPts val="600"/>
               </a:spcBef>
-              <a:defRPr sz="1200">
+            </a:pPr>
+            <a:r>
+              <a:rPr sz="1200" b="0">
                 <a:solidFill>
                   <a:srgbClr val="102A43"/>
                 </a:solidFill>
-              </a:defRPr>
-            </a:pPr>
-            <a:r>
+                <a:latin typeface="Liberation Sans"/>
+              </a:rPr>
               <a:t>Nem követhető a vezeték vagy kapocs.</a:t>
             </a:r>
           </a:p>
@@ -8507,14 +8454,13 @@
           </a:bodyPr>
           <a:lstStyle/>
           <a:p>
-            <a:pPr>
-              <a:defRPr b="1" sz="1600">
+            <a:r>
+              <a:rPr sz="1600" b="1">
                 <a:solidFill>
                   <a:srgbClr val="0D47A1"/>
                 </a:solidFill>
-              </a:defRPr>
-            </a:pPr>
-            <a:r>
+                <a:latin typeface="Liberation Sans"/>
+              </a:rPr>
               <a:t>MÉRTÉKEGYSÉG NÉLKÜL</a:t>
             </a:r>
           </a:p>
@@ -8523,13 +8469,14 @@
               <a:spcBef>
                 <a:spcPts val="600"/>
               </a:spcBef>
-              <a:defRPr sz="1200">
+            </a:pPr>
+            <a:r>
+              <a:rPr sz="1200" b="0">
                 <a:solidFill>
                   <a:srgbClr val="102A43"/>
                 </a:solidFill>
-              </a:defRPr>
-            </a:pPr>
-            <a:r>
+                <a:latin typeface="Liberation Sans"/>
+              </a:rPr>
               <a:t>A mérési adat félreérthető.</a:t>
             </a:r>
           </a:p>
@@ -8602,14 +8549,13 @@
           </a:bodyPr>
           <a:lstStyle/>
           <a:p>
-            <a:pPr>
-              <a:defRPr b="1" sz="1600">
+            <a:r>
+              <a:rPr sz="1600" b="1">
                 <a:solidFill>
                   <a:srgbClr val="0D47A1"/>
                 </a:solidFill>
-              </a:defRPr>
-            </a:pPr>
-            <a:r>
+                <a:latin typeface="Liberation Sans"/>
+              </a:rPr>
               <a:t>NINCS MÓDOSÍTÁSI NYOM</a:t>
             </a:r>
           </a:p>
@@ -8618,13 +8564,14 @@
               <a:spcBef>
                 <a:spcPts val="600"/>
               </a:spcBef>
-              <a:defRPr sz="1200">
+            </a:pPr>
+            <a:r>
+              <a:rPr sz="1200" b="0">
                 <a:solidFill>
                   <a:srgbClr val="102A43"/>
                 </a:solidFill>
-              </a:defRPr>
-            </a:pPr>
-            <a:r>
+                <a:latin typeface="Liberation Sans"/>
+              </a:rPr>
               <a:t>Nem tudható, mikor és mi változott.</a:t>
             </a:r>
           </a:p>
@@ -8721,14 +8668,13 @@
           </a:bodyPr>
           <a:lstStyle/>
           <a:p>
-            <a:pPr>
-              <a:defRPr sz="900">
+            <a:r>
+              <a:rPr sz="900" b="0">
                 <a:solidFill>
                   <a:srgbClr val="52606D"/>
                 </a:solidFill>
-              </a:defRPr>
-            </a:pPr>
-            <a:r>
+                <a:latin typeface="Liberation Sans"/>
+              </a:rPr>
               <a:t>IAP - Integrált Automatika Program | Villamos szerelések 11.</a:t>
             </a:r>
           </a:p>
@@ -8756,14 +8702,13 @@
           </a:bodyPr>
           <a:lstStyle/>
           <a:p>
-            <a:pPr>
-              <a:defRPr b="1" sz="2700">
+            <a:r>
+              <a:rPr sz="2700" b="1">
                 <a:solidFill>
                   <a:srgbClr val="0D47A1"/>
                 </a:solidFill>
-              </a:defRPr>
-            </a:pPr>
-            <a:r>
+                <a:latin typeface="Liberation Sans"/>
+              </a:rPr>
               <a:t>Műhelyfeladat - dokumentációs audit</a:t>
             </a:r>
           </a:p>
@@ -8836,14 +8781,13 @@
           </a:bodyPr>
           <a:lstStyle/>
           <a:p>
-            <a:pPr>
-              <a:defRPr b="1" sz="1600">
+            <a:r>
+              <a:rPr sz="1600" b="1">
                 <a:solidFill>
                   <a:srgbClr val="0D47A1"/>
                 </a:solidFill>
-              </a:defRPr>
-            </a:pPr>
-            <a:r>
+                <a:latin typeface="Liberation Sans"/>
+              </a:rPr>
               <a:t>1. állomás</a:t>
             </a:r>
           </a:p>
@@ -8852,13 +8796,14 @@
               <a:spcBef>
                 <a:spcPts val="600"/>
               </a:spcBef>
-              <a:defRPr sz="1200">
+            </a:pPr>
+            <a:r>
+              <a:rPr sz="1200" b="0">
                 <a:solidFill>
                   <a:srgbClr val="102A43"/>
                 </a:solidFill>
-              </a:defRPr>
-            </a:pPr>
-            <a:r>
+                <a:latin typeface="Liberation Sans"/>
+              </a:rPr>
               <a:t>Készülék- és kapocsazonosítás</a:t>
             </a:r>
           </a:p>
@@ -8931,14 +8876,13 @@
           </a:bodyPr>
           <a:lstStyle/>
           <a:p>
-            <a:pPr>
-              <a:defRPr b="1" sz="1600">
+            <a:r>
+              <a:rPr sz="1600" b="1">
                 <a:solidFill>
                   <a:srgbClr val="0D47A1"/>
                 </a:solidFill>
-              </a:defRPr>
-            </a:pPr>
-            <a:r>
+                <a:latin typeface="Liberation Sans"/>
+              </a:rPr>
               <a:t>2. állomás</a:t>
             </a:r>
           </a:p>
@@ -8947,13 +8891,14 @@
               <a:spcBef>
                 <a:spcPts val="600"/>
               </a:spcBef>
-              <a:defRPr sz="1200">
+            </a:pPr>
+            <a:r>
+              <a:rPr sz="1200" b="0">
                 <a:solidFill>
                   <a:srgbClr val="102A43"/>
                 </a:solidFill>
-              </a:defRPr>
-            </a:pPr>
-            <a:r>
+                <a:latin typeface="Liberation Sans"/>
+              </a:rPr>
               <a:t>Rajz és valós bekötés összevetése</a:t>
             </a:r>
           </a:p>
@@ -9026,14 +8971,13 @@
           </a:bodyPr>
           <a:lstStyle/>
           <a:p>
-            <a:pPr>
-              <a:defRPr b="1" sz="1600">
+            <a:r>
+              <a:rPr sz="1600" b="1">
                 <a:solidFill>
                   <a:srgbClr val="0D47A1"/>
                 </a:solidFill>
-              </a:defRPr>
-            </a:pPr>
-            <a:r>
+                <a:latin typeface="Liberation Sans"/>
+              </a:rPr>
               <a:t>3. állomás</a:t>
             </a:r>
           </a:p>
@@ -9042,13 +8986,14 @@
               <a:spcBef>
                 <a:spcPts val="600"/>
               </a:spcBef>
-              <a:defRPr sz="1200">
+            </a:pPr>
+            <a:r>
+              <a:rPr sz="1200" b="0">
                 <a:solidFill>
                   <a:srgbClr val="102A43"/>
                 </a:solidFill>
-              </a:defRPr>
-            </a:pPr>
-            <a:r>
+                <a:latin typeface="Liberation Sans"/>
+              </a:rPr>
               <a:t>Darabjegyzék + vezetékjegyzék</a:t>
             </a:r>
           </a:p>
@@ -9121,14 +9066,13 @@
           </a:bodyPr>
           <a:lstStyle/>
           <a:p>
-            <a:pPr>
-              <a:defRPr b="1" sz="1600">
+            <a:r>
+              <a:rPr sz="1600" b="1">
                 <a:solidFill>
                   <a:srgbClr val="0D47A1"/>
                 </a:solidFill>
-              </a:defRPr>
-            </a:pPr>
-            <a:r>
+                <a:latin typeface="Liberation Sans"/>
+              </a:rPr>
               <a:t>4. állomás</a:t>
             </a:r>
           </a:p>
@@ -9137,13 +9081,14 @@
               <a:spcBef>
                 <a:spcPts val="600"/>
               </a:spcBef>
-              <a:defRPr sz="1200">
+            </a:pPr>
+            <a:r>
+              <a:rPr sz="1200" b="0">
                 <a:solidFill>
                   <a:srgbClr val="102A43"/>
                 </a:solidFill>
-              </a:defRPr>
-            </a:pPr>
-            <a:r>
+                <a:latin typeface="Liberation Sans"/>
+              </a:rPr>
               <a:t>Mérési adatlap és páros ellenőrzés</a:t>
             </a:r>
           </a:p>
